--- a/docs/documents/samples/brightwater-research-studio_reducing-first-month-cancellations-for_v1_ad40.pptx
+++ b/docs/documents/samples/brightwater-research-studio_reducing-first-month-cancellations-for_v1_ad40.pptx
@@ -2858,7 +2858,7 @@
         <p:spPr>
           <a:xfrm>
             <a:off x="609600" y="609600"/>
-            <a:ext cx="10972800" cy="365760"/>
+            <a:ext cx="10972800" cy="731520"/>
           </a:xfrm>
           <a:prstGeom prst="rect">
             <a:avLst/>
@@ -2885,7 +2885,7 @@
                 <a:ea typeface="Archivo SemiCondensed SemiBold" pitchFamily="34" charset="-122"/>
                 <a:cs typeface="Archivo SemiCondensed SemiBold" pitchFamily="34" charset="-120"/>
               </a:rPr>
-              <a:t>Evidence: when members leave, and the reasons they give when asked at cancellation</a:t>
+              <a:t>Evidence: when members leave, and the reasons they give when asked at cancellation (continued)</a:t>
             </a:r>
             <a:endParaRPr lang="en-US" sz="2400" dirty="0"/>
           </a:p>
@@ -2899,7 +2899,7 @@
         </p:nvSpPr>
         <p:spPr>
           <a:xfrm>
-            <a:off x="609600" y="1280160"/>
+            <a:off x="609600" y="1645920"/>
             <a:ext cx="10972800" cy="205740"/>
           </a:xfrm>
           <a:prstGeom prst="rect">
@@ -2957,7 +2957,7 @@
           <p:nvPr/>
         </p:nvGraphicFramePr>
         <p:xfrm>
-          <a:off x="609600" y="1562100"/>
+          <a:off x="609600" y="1927860"/>
           <a:ext cx="10972800" cy="2794000"/>
         </p:xfrm>
         <a:graphic xmlns:a="http://schemas.openxmlformats.org/drawingml/2006/main">
@@ -2974,7 +2974,7 @@
         </p:nvSpPr>
         <p:spPr>
           <a:xfrm>
-            <a:off x="609600" y="4432300"/>
+            <a:off x="609600" y="4798060"/>
             <a:ext cx="10972800" cy="205740"/>
           </a:xfrm>
           <a:prstGeom prst="rect">
@@ -3016,7 +3016,7 @@
         </p:nvSpPr>
         <p:spPr>
           <a:xfrm>
-            <a:off x="609600" y="4714240"/>
+            <a:off x="609600" y="5080000"/>
             <a:ext cx="10972800" cy="205740"/>
           </a:xfrm>
           <a:prstGeom prst="rect">
@@ -3175,7 +3175,7 @@
         <p:spPr>
           <a:xfrm>
             <a:off x="609600" y="609600"/>
-            <a:ext cx="10972800" cy="365760"/>
+            <a:ext cx="10972800" cy="731520"/>
           </a:xfrm>
           <a:prstGeom prst="rect">
             <a:avLst/>
@@ -3202,7 +3202,7 @@
                 <a:ea typeface="Archivo SemiCondensed SemiBold" pitchFamily="34" charset="-122"/>
                 <a:cs typeface="Archivo SemiCondensed SemiBold" pitchFamily="34" charset="-120"/>
               </a:rPr>
-              <a:t>Evidence: when members leave, and the reasons they give when asked at cancellation</a:t>
+              <a:t>Evidence: when members leave, and the reasons they give when asked at cancellation (continued)</a:t>
             </a:r>
             <a:endParaRPr lang="en-US" sz="2400" dirty="0"/>
           </a:p>
@@ -3216,7 +3216,7 @@
         </p:nvSpPr>
         <p:spPr>
           <a:xfrm>
-            <a:off x="609600" y="1280160"/>
+            <a:off x="609600" y="1645920"/>
             <a:ext cx="10972800" cy="960120"/>
           </a:xfrm>
           <a:prstGeom prst="rect">
@@ -3292,7 +3292,7 @@
         </p:nvSpPr>
         <p:spPr>
           <a:xfrm>
-            <a:off x="609600" y="2392680"/>
+            <a:off x="609600" y="2758440"/>
             <a:ext cx="10972800" cy="320040"/>
           </a:xfrm>
           <a:prstGeom prst="rect">
@@ -3351,7 +3351,7 @@
         </p:nvSpPr>
         <p:spPr>
           <a:xfrm>
-            <a:off x="609600" y="3017520"/>
+            <a:off x="609600" y="3383280"/>
             <a:ext cx="10972800" cy="365760"/>
           </a:xfrm>
           <a:prstGeom prst="rect">
@@ -3393,7 +3393,7 @@
         </p:nvSpPr>
         <p:spPr>
           <a:xfrm>
-            <a:off x="609600" y="3688080"/>
+            <a:off x="609600" y="4053840"/>
             <a:ext cx="304800" cy="320040"/>
           </a:xfrm>
           <a:prstGeom prst="rect">
@@ -3435,7 +3435,7 @@
         </p:nvSpPr>
         <p:spPr>
           <a:xfrm>
-            <a:off x="914400" y="3688080"/>
+            <a:off x="914400" y="4053840"/>
             <a:ext cx="10668000" cy="320040"/>
           </a:xfrm>
           <a:prstGeom prst="rect">
@@ -3477,7 +3477,7 @@
         </p:nvSpPr>
         <p:spPr>
           <a:xfrm>
-            <a:off x="609600" y="4084320"/>
+            <a:off x="609600" y="4450080"/>
             <a:ext cx="304800" cy="320040"/>
           </a:xfrm>
           <a:prstGeom prst="rect">
@@ -3519,7 +3519,7 @@
         </p:nvSpPr>
         <p:spPr>
           <a:xfrm>
-            <a:off x="914400" y="4084320"/>
+            <a:off x="914400" y="4450080"/>
             <a:ext cx="10668000" cy="320040"/>
           </a:xfrm>
           <a:prstGeom prst="rect">
@@ -3561,7 +3561,7 @@
         </p:nvSpPr>
         <p:spPr>
           <a:xfrm>
-            <a:off x="609600" y="4480560"/>
+            <a:off x="609600" y="4846320"/>
             <a:ext cx="304800" cy="320040"/>
           </a:xfrm>
           <a:prstGeom prst="rect">
@@ -3603,7 +3603,7 @@
         </p:nvSpPr>
         <p:spPr>
           <a:xfrm>
-            <a:off x="914400" y="4480560"/>
+            <a:off x="914400" y="4846320"/>
             <a:ext cx="10668000" cy="320040"/>
           </a:xfrm>
           <a:prstGeom prst="rect">
@@ -3679,7 +3679,7 @@
         </p:nvSpPr>
         <p:spPr>
           <a:xfrm>
-            <a:off x="457200" y="4953000"/>
+            <a:off x="457200" y="5318760"/>
             <a:ext cx="25400" cy="320040"/>
           </a:xfrm>
           <a:prstGeom prst="rect">
@@ -3699,7 +3699,7 @@
         </p:nvSpPr>
         <p:spPr>
           <a:xfrm>
-            <a:off x="609600" y="4953000"/>
+            <a:off x="609600" y="5318760"/>
             <a:ext cx="10972800" cy="320040"/>
           </a:xfrm>
           <a:prstGeom prst="rect">
